--- a/output/archive/VellacombeData/Marketing/Pitches/2023/VD_integrated-discovery_pitch_03Oct23.pptx
+++ b/output/archive/VellacombeData/Marketing/Pitches/2023/VD_integrated-discovery_pitch_03Oct23.pptx
@@ -3711,7 +3711,7 @@
               <a:rPr sz="2000">
                 <a:latin typeface="Arial"/>
               </a:rPr>
-              <a:t>We return a route-scout proposal within a week</a:t>
+              <a:t>We return a scoped route-scout proposal after reviewing the structures</a:t>
             </a:r>
           </a:p>
           <a:p>
@@ -3898,7 +3898,7 @@
               <a:rPr sz="2000">
                 <a:latin typeface="Arial"/>
               </a:rPr>
-              <a:t>Compound cards with identity and area-percent purity for every delivery</a:t>
+              <a:t>Compound cards with identity and purity for every delivery</a:t>
             </a:r>
           </a:p>
           <a:p>
@@ -4432,7 +4432,7 @@
               <a:rPr sz="2000">
                 <a:latin typeface="Arial"/>
               </a:rPr>
-              <a:t>Typical sets of 12-40 compounds</a:t>
+              <a:t>Analogue set size and delivery quantities agreed in the proposal</a:t>
             </a:r>
           </a:p>
           <a:p>
@@ -4441,7 +4441,7 @@
               <a:rPr sz="2000">
                 <a:latin typeface="Arial"/>
               </a:rPr>
-              <a:t>Delivery in lots, 10-50 mg each</a:t>
+              <a:t>Identity by LC-MS and 1H NMR</a:t>
             </a:r>
           </a:p>
           <a:p>
@@ -4450,7 +4450,7 @@
               <a:rPr sz="2000">
                 <a:latin typeface="Arial"/>
               </a:rPr>
-              <a:t>Purity release by LCMS area percent</a:t>
+              <a:t>Chromatographic area-percent purity by the specified LC detector and method</a:t>
             </a:r>
           </a:p>
         </p:txBody>
@@ -5020,7 +5020,7 @@
               <a:rPr sz="2000">
                 <a:latin typeface="Arial"/>
               </a:rPr>
-              <a:t>Delivery lots every two to three weeks</a:t>
+              <a:t>Delivery lots at agreed route gates</a:t>
             </a:r>
           </a:p>
           <a:p>
@@ -5189,7 +5189,7 @@
               <a:rPr sz="2000">
                 <a:latin typeface="Arial"/>
               </a:rPr>
-              <a:t>Thirty years of route experience</a:t>
+              <a:t>Nearly thirty years of route experience</a:t>
             </a:r>
           </a:p>
           <a:p>
